--- a/powerpoint/Presentasjon_Enhet202_Operativ_Avviksrapport_2026.pptx
+++ b/powerpoint/Presentasjon_Enhet202_Operativ_Avviksrapport_2026.pptx
@@ -3214,7 +3214,7 @@
               </a:defRPr>
             </a:pPr>
             <a:r>
-              <a:t>Dato: 14.10.2026  •  Rektor, Enhet 202 Grunnskole  /  Frank Ellingsen, Senior Controller</a:t>
+              <a:t>Dato: 17.10.2026  •  Rektor, Enhet 202 Grunnskole  /  Frank Ellingsen, Senior Controller</a:t>
             </a:r>
           </a:p>
           <a:p>
@@ -3229,7 +3229,7 @@
               </a:defRPr>
             </a:pPr>
             <a:r>
-              <a:t>Audit Stempel: 3d24de0d106b3661ebe8d8b3...  |  Statusrapport Økonomidialog</a:t>
+              <a:t>Audit Stempel: 065dc5824ebee4f5fc974695...  |  Statusrapport Økonomidialog</a:t>
             </a:r>
           </a:p>
         </p:txBody>
@@ -3489,7 +3489,7 @@
               </a:defRPr>
             </a:pPr>
             <a:r>
-              <a:t>MERFORBRUK HITTIL I ÅR</a:t>
+              <a:t>AVVIK HITTIL I ÅR (CV)</a:t>
             </a:r>
           </a:p>
           <a:p>
@@ -3504,7 +3504,7 @@
               </a:defRPr>
             </a:pPr>
             <a:r>
-              <a:t>+1 420 000 kr</a:t>
+              <a:t>-1 420 000 kr</a:t>
             </a:r>
           </a:p>
           <a:p>
@@ -3519,7 +3519,7 @@
               </a:defRPr>
             </a:pPr>
             <a:r>
-              <a:t>+11,4 % over periodisert budsjett (Rød alarm)</a:t>
+              <a:t>-11,4 % mot periodisert budsjett (Rød alarm)</a:t>
             </a:r>
           </a:p>
         </p:txBody>
@@ -3599,7 +3599,7 @@
               </a:defRPr>
             </a:pPr>
             <a:r>
-              <a:t>HELÅRSPROGNOSE UTEN TILTAK</a:t>
+              <a:t>FORVENTET HELÅRSAVVIK (VAC)</a:t>
             </a:r>
           </a:p>
           <a:p>
@@ -3614,7 +3614,7 @@
               </a:defRPr>
             </a:pPr>
             <a:r>
-              <a:t>+2 130 000 kr</a:t>
+              <a:t>-2 130 000 kr</a:t>
             </a:r>
           </a:p>
           <a:p>
@@ -3629,7 +3629,7 @@
               </a:defRPr>
             </a:pPr>
             <a:r>
-              <a:t>Worst case-eskalering ved uendret drift</a:t>
+              <a:t>Worst case-eskalering uten tiltak (§ 14-5)</a:t>
             </a:r>
           </a:p>
         </p:txBody>
@@ -3746,7 +3746,7 @@
               </a:defRPr>
             </a:pPr>
             <a:r>
-              <a:t>Kristiansand kommune | Økonomi &amp; Virksomhetsstyring  •  Audit ID: 3d24de0d106b  •  Side 2 av 7</a:t>
+              <a:t>Kristiansand kommune | Økonomi &amp; Virksomhetsstyring  •  Audit ID: 065dc5824ebe  •  Side 2 av 7</a:t>
             </a:r>
           </a:p>
         </p:txBody>
@@ -4034,7 +4034,7 @@
                         </a:defRPr>
                       </a:pPr>
                       <a:r>
-                        <a:t>+870 000 kr</a:t>
+                        <a:t>-870 000 kr</a:t>
                       </a:r>
                     </a:p>
                   </a:txBody>
@@ -4135,7 +4135,7 @@
                         </a:defRPr>
                       </a:pPr>
                       <a:r>
-                        <a:t>+420 000 kr</a:t>
+                        <a:t>-420 000 kr</a:t>
                       </a:r>
                     </a:p>
                   </a:txBody>
@@ -4236,7 +4236,7 @@
                         </a:defRPr>
                       </a:pPr>
                       <a:r>
-                        <a:t>+150 000 kr</a:t>
+                        <a:t>-150 000 kr</a:t>
                       </a:r>
                     </a:p>
                   </a:txBody>
@@ -4337,7 +4337,7 @@
                         </a:defRPr>
                       </a:pPr>
                       <a:r>
-                        <a:t>-20 000 kr</a:t>
+                        <a:t>+20 000 kr</a:t>
                       </a:r>
                     </a:p>
                   </a:txBody>
@@ -4402,7 +4402,7 @@
               </a:defRPr>
             </a:pPr>
             <a:r>
-              <a:t>Kristiansand kommune | Økonomi &amp; Virksomhetsstyring  •  Audit ID: 3d24de0d106b  •  Side 3 av 7</a:t>
+              <a:t>Kristiansand kommune | Økonomi &amp; Virksomhetsstyring  •  Audit ID: 065dc5824ebe  •  Side 3 av 7</a:t>
             </a:r>
           </a:p>
         </p:txBody>
@@ -4793,7 +4793,7 @@
               </a:defRPr>
             </a:pPr>
             <a:r>
-              <a:t>Kristiansand kommune | Økonomi &amp; Virksomhetsstyring  •  Audit ID: 3d24de0d106b  •  Side 4 av 7</a:t>
+              <a:t>Kristiansand kommune | Økonomi &amp; Virksomhetsstyring  •  Audit ID: 065dc5824ebe  •  Side 4 av 7</a:t>
             </a:r>
           </a:p>
         </p:txBody>
@@ -5310,7 +5310,7 @@
               </a:defRPr>
             </a:pPr>
             <a:r>
-              <a:t>Kristiansand kommune | Økonomi &amp; Virksomhetsstyring  •  Audit ID: 3d24de0d106b  •  Side 5 av 7</a:t>
+              <a:t>Kristiansand kommune | Økonomi &amp; Virksomhetsstyring  •  Audit ID: 065dc5824ebe  •  Side 5 av 7</a:t>
             </a:r>
           </a:p>
         </p:txBody>
@@ -5966,7 +5966,7 @@
               </a:defRPr>
             </a:pPr>
             <a:r>
-              <a:t>Kristiansand kommune | Økonomi &amp; Virksomhetsstyring  •  Audit ID: 3d24de0d106b  •  Side 6 av 7</a:t>
+              <a:t>Kristiansand kommune | Økonomi &amp; Virksomhetsstyring  •  Audit ID: 065dc5824ebe  •  Side 6 av 7</a:t>
             </a:r>
           </a:p>
         </p:txBody>
@@ -6165,7 +6165,7 @@
               </a:defRPr>
             </a:pPr>
             <a:r>
-              <a:t>Kristiansand, 14.10.2026  •  Rektor, Enhet 202  /  Frank Ellingsen, Senior Controller (Stage-Gate Port 9 Attestert)</a:t>
+              <a:t>Kristiansand, 17.10.2026  •  Rektor, Enhet 202  /  Frank Ellingsen, Senior Controller (Stage-Gate Port 9 Attestert)</a:t>
             </a:r>
           </a:p>
         </p:txBody>
@@ -6201,7 +6201,7 @@
               </a:defRPr>
             </a:pPr>
             <a:r>
-              <a:t>Kristiansand kommune | Økonomi &amp; Virksomhetsstyring  •  Audit ID: 3d24de0d106b  •  Side 7 av 7</a:t>
+              <a:t>Kristiansand kommune | Økonomi &amp; Virksomhetsstyring  •  Audit ID: 065dc5824ebe  •  Side 7 av 7</a:t>
             </a:r>
           </a:p>
         </p:txBody>
